--- a/gxls-mdae-slides.pptx
+++ b/gxls-mdae-slides.pptx
@@ -268,7 +268,7 @@
           <a:p>
             <a:fld id="{17A98A70-FA8C-4354-959C-C70678AC9BCF}" type="datetimeFigureOut">
               <a:rPr lang="en-US" smtClean="0"/>
-              <a:t>9/22/2024</a:t>
+              <a:t>9/13/2025</a:t>
             </a:fld>
             <a:endParaRPr lang="en-US"/>
           </a:p>
@@ -2845,7 +2845,7 @@
             <a:fld id="{1D8BD707-D9CF-40AE-B4C6-C98DA3205C09}" type="datetimeFigureOut">
               <a:rPr lang="en-US" smtClean="0"/>
               <a:pPr/>
-              <a:t>9/22/2024</a:t>
+              <a:t>9/13/2025</a:t>
             </a:fld>
             <a:endParaRPr lang="en-US"/>
           </a:p>
@@ -3010,7 +3010,7 @@
             <a:fld id="{1D8BD707-D9CF-40AE-B4C6-C98DA3205C09}" type="datetimeFigureOut">
               <a:rPr lang="en-US" smtClean="0"/>
               <a:pPr/>
-              <a:t>9/22/2024</a:t>
+              <a:t>9/13/2025</a:t>
             </a:fld>
             <a:endParaRPr lang="en-US"/>
           </a:p>
@@ -3185,7 +3185,7 @@
             <a:fld id="{1D8BD707-D9CF-40AE-B4C6-C98DA3205C09}" type="datetimeFigureOut">
               <a:rPr lang="en-US" smtClean="0"/>
               <a:pPr/>
-              <a:t>9/22/2024</a:t>
+              <a:t>9/13/2025</a:t>
             </a:fld>
             <a:endParaRPr lang="en-US"/>
           </a:p>
@@ -3350,7 +3350,7 @@
             <a:fld id="{1D8BD707-D9CF-40AE-B4C6-C98DA3205C09}" type="datetimeFigureOut">
               <a:rPr lang="en-US" smtClean="0"/>
               <a:pPr/>
-              <a:t>9/22/2024</a:t>
+              <a:t>9/13/2025</a:t>
             </a:fld>
             <a:endParaRPr lang="en-US"/>
           </a:p>
@@ -3592,7 +3592,7 @@
             <a:fld id="{1D8BD707-D9CF-40AE-B4C6-C98DA3205C09}" type="datetimeFigureOut">
               <a:rPr lang="en-US" smtClean="0"/>
               <a:pPr/>
-              <a:t>9/22/2024</a:t>
+              <a:t>9/13/2025</a:t>
             </a:fld>
             <a:endParaRPr lang="en-US"/>
           </a:p>
@@ -3874,7 +3874,7 @@
             <a:fld id="{1D8BD707-D9CF-40AE-B4C6-C98DA3205C09}" type="datetimeFigureOut">
               <a:rPr lang="en-US" smtClean="0"/>
               <a:pPr/>
-              <a:t>9/22/2024</a:t>
+              <a:t>9/13/2025</a:t>
             </a:fld>
             <a:endParaRPr lang="en-US"/>
           </a:p>
@@ -4290,7 +4290,7 @@
             <a:fld id="{1D8BD707-D9CF-40AE-B4C6-C98DA3205C09}" type="datetimeFigureOut">
               <a:rPr lang="en-US" smtClean="0"/>
               <a:pPr/>
-              <a:t>9/22/2024</a:t>
+              <a:t>9/13/2025</a:t>
             </a:fld>
             <a:endParaRPr lang="en-US"/>
           </a:p>
@@ -4404,7 +4404,7 @@
             <a:fld id="{1D8BD707-D9CF-40AE-B4C6-C98DA3205C09}" type="datetimeFigureOut">
               <a:rPr lang="en-US" smtClean="0"/>
               <a:pPr/>
-              <a:t>9/22/2024</a:t>
+              <a:t>9/13/2025</a:t>
             </a:fld>
             <a:endParaRPr lang="en-US"/>
           </a:p>
@@ -4496,7 +4496,7 @@
             <a:fld id="{1D8BD707-D9CF-40AE-B4C6-C98DA3205C09}" type="datetimeFigureOut">
               <a:rPr lang="en-US" smtClean="0"/>
               <a:pPr/>
-              <a:t>9/22/2024</a:t>
+              <a:t>9/13/2025</a:t>
             </a:fld>
             <a:endParaRPr lang="en-US"/>
           </a:p>
@@ -4768,7 +4768,7 @@
             <a:fld id="{1D8BD707-D9CF-40AE-B4C6-C98DA3205C09}" type="datetimeFigureOut">
               <a:rPr lang="en-US" smtClean="0"/>
               <a:pPr/>
-              <a:t>9/22/2024</a:t>
+              <a:t>9/13/2025</a:t>
             </a:fld>
             <a:endParaRPr lang="en-US"/>
           </a:p>
@@ -5017,7 +5017,7 @@
             <a:fld id="{1D8BD707-D9CF-40AE-B4C6-C98DA3205C09}" type="datetimeFigureOut">
               <a:rPr lang="en-US" smtClean="0"/>
               <a:pPr/>
-              <a:t>9/22/2024</a:t>
+              <a:t>9/13/2025</a:t>
             </a:fld>
             <a:endParaRPr lang="en-US"/>
           </a:p>
@@ -5230,7 +5230,7 @@
             <a:fld id="{1D8BD707-D9CF-40AE-B4C6-C98DA3205C09}" type="datetimeFigureOut">
               <a:rPr lang="en-US" smtClean="0"/>
               <a:pPr/>
-              <a:t>9/22/2024</a:t>
+              <a:t>9/13/2025</a:t>
             </a:fld>
             <a:endParaRPr lang="en-US"/>
           </a:p>
@@ -8840,7 +8840,7 @@
           <a:lstStyle/>
           <a:p>
             <a:r>
-              <a:rPr lang="en-US" sz="9900" b="1" dirty="0">
+              <a:rPr lang="en-US" sz="9900" b="1">
                 <a:solidFill>
                   <a:schemeClr val="bg1"/>
                 </a:solidFill>
@@ -8848,6 +8848,12 @@
               </a:rPr>
               <a:t>Hi, I’m George</a:t>
             </a:r>
+            <a:endParaRPr lang="en-US" sz="9900" b="1" dirty="0">
+              <a:solidFill>
+                <a:schemeClr val="bg1"/>
+              </a:solidFill>
+              <a:latin typeface="Normafixed Tryout" panose="00000409000000000000" pitchFamily="49" charset="0"/>
+            </a:endParaRPr>
           </a:p>
         </p:txBody>
       </p:sp>
@@ -9073,6 +9079,36 @@
               </a14:hiddenFill>
             </a:ext>
           </a:extLst>
+        </p:spPr>
+      </p:pic>
+      <p:pic>
+        <p:nvPicPr>
+          <p:cNvPr id="7" name="Picture 6" descr="linkedinlearninginstructor #linkedinlearning | Thais Cooke | 80 comments">
+            <a:extLst>
+              <a:ext uri="{FF2B5EF4-FFF2-40B4-BE49-F238E27FC236}">
+                <a16:creationId xmlns:a16="http://schemas.microsoft.com/office/drawing/2014/main" id="{8352FEA3-9CFE-D937-CF4C-B6FA82CCA4D2}"/>
+              </a:ext>
+            </a:extLst>
+          </p:cNvPr>
+          <p:cNvPicPr>
+            <a:picLocks noChangeAspect="1"/>
+          </p:cNvPicPr>
+          <p:nvPr/>
+        </p:nvPicPr>
+        <p:blipFill>
+          <a:blip r:embed="rId8"/>
+          <a:stretch>
+            <a:fillRect/>
+          </a:stretch>
+        </p:blipFill>
+        <p:spPr>
+          <a:xfrm>
+            <a:off x="9448800" y="815983"/>
+            <a:ext cx="3333750" cy="1371600"/>
+          </a:xfrm>
+          <a:prstGeom prst="rect">
+            <a:avLst/>
+          </a:prstGeom>
         </p:spPr>
       </p:pic>
     </p:spTree>
@@ -14362,7 +14398,7 @@
         <p:spPr>
           <a:xfrm>
             <a:off x="520861" y="3191948"/>
-            <a:ext cx="14393120" cy="2800767"/>
+            <a:ext cx="14393120" cy="3108543"/>
           </a:xfrm>
           <a:prstGeom prst="rect">
             <a:avLst/>
@@ -14392,17 +14428,17 @@
               <a:t>Download the resources: </a:t>
             </a:r>
             <a:r>
-              <a:rPr lang="en-US" sz="8800" dirty="0">
+              <a:rPr lang="en-US" sz="5400" dirty="0">
                 <a:solidFill>
                   <a:srgbClr val="707070"/>
                 </a:solidFill>
                 <a:latin typeface="Pragmatica" panose="020B0403040502020204" pitchFamily="34" charset="0"/>
                 <a:hlinkClick r:id="rId2"/>
               </a:rPr>
-              <a:t>https://swiy.co/xlgs-sep-24</a:t>
-            </a:r>
-            <a:r>
-              <a:rPr lang="en-US" sz="8800" dirty="0">
+              <a:t>https://github.com/stringfestdata/gxls-mdae/archive/refs/heads/main.zip</a:t>
+            </a:r>
+            <a:r>
+              <a:rPr lang="en-US" sz="5400" dirty="0">
                 <a:solidFill>
                   <a:srgbClr val="707070"/>
                 </a:solidFill>
